--- a/public/videos/repositories/ai-tool-diagnoser/ai-tool-diagnoser-tech-preview.pptx
+++ b/public/videos/repositories/ai-tool-diagnoser/ai-tool-diagnoser-tech-preview.pptx
@@ -134,7 +134,7 @@
           <p:cNvPr id="2" name="タイトル 1">
             <a:extLst>
               <a:ext uri="{FF2B5EF4-FFF2-40B4-BE49-F238E27FC236}">
-                <a16:creationId xmlns:a16="http://schemas.microsoft.com/office/drawing/2014/main" id="{618DAFB3-6A0C-ACE7-AAEA-E9E143301B7D}"/>
+                <a16:creationId xmlns:a16="http://schemas.microsoft.com/office/drawing/2014/main" id="{FE631983-3B61-7C80-1F8D-15E85D58C931}"/>
               </a:ext>
             </a:extLst>
           </p:cNvPr>
@@ -171,7 +171,7 @@
           <p:cNvPr id="3" name="字幕 2">
             <a:extLst>
               <a:ext uri="{FF2B5EF4-FFF2-40B4-BE49-F238E27FC236}">
-                <a16:creationId xmlns:a16="http://schemas.microsoft.com/office/drawing/2014/main" id="{DDB60306-9195-CBFB-EE81-A32FEA040BE4}"/>
+                <a16:creationId xmlns:a16="http://schemas.microsoft.com/office/drawing/2014/main" id="{2663A657-8679-BD0E-51F1-CDA536EFF51A}"/>
               </a:ext>
             </a:extLst>
           </p:cNvPr>
@@ -241,7 +241,7 @@
           <p:cNvPr id="4" name="日付プレースホルダー 3">
             <a:extLst>
               <a:ext uri="{FF2B5EF4-FFF2-40B4-BE49-F238E27FC236}">
-                <a16:creationId xmlns:a16="http://schemas.microsoft.com/office/drawing/2014/main" id="{473A9DDE-0DD2-D2F9-4B5F-293E1F13AD11}"/>
+                <a16:creationId xmlns:a16="http://schemas.microsoft.com/office/drawing/2014/main" id="{CD92DDE5-AAAA-024A-245B-D95A2CFC0F5E}"/>
               </a:ext>
             </a:extLst>
           </p:cNvPr>
@@ -257,7 +257,7 @@
           <a:bodyPr/>
           <a:lstStyle/>
           <a:p>
-            <a:fld id="{62F14CDA-7F90-4E7F-8C43-D97DD14A1558}" type="datetimeFigureOut">
+            <a:fld id="{B3C8292C-6C7C-40C2-9CE5-631942545785}" type="datetimeFigureOut">
               <a:rPr kumimoji="1" lang="ja-JP" altLang="en-US" smtClean="0"/>
               <a:t>2026/7/30</a:t>
             </a:fld>
@@ -270,7 +270,7 @@
           <p:cNvPr id="5" name="フッター プレースホルダー 4">
             <a:extLst>
               <a:ext uri="{FF2B5EF4-FFF2-40B4-BE49-F238E27FC236}">
-                <a16:creationId xmlns:a16="http://schemas.microsoft.com/office/drawing/2014/main" id="{D506B286-6D2C-B26D-4182-7833F13692CF}"/>
+                <a16:creationId xmlns:a16="http://schemas.microsoft.com/office/drawing/2014/main" id="{C1DC307B-5304-AF94-51F4-FE4A8610AA4E}"/>
               </a:ext>
             </a:extLst>
           </p:cNvPr>
@@ -295,7 +295,7 @@
           <p:cNvPr id="6" name="スライド番号プレースホルダー 5">
             <a:extLst>
               <a:ext uri="{FF2B5EF4-FFF2-40B4-BE49-F238E27FC236}">
-                <a16:creationId xmlns:a16="http://schemas.microsoft.com/office/drawing/2014/main" id="{A42BF049-DFBB-0EF5-53F5-68C0411E7E9F}"/>
+                <a16:creationId xmlns:a16="http://schemas.microsoft.com/office/drawing/2014/main" id="{4FB45C64-0C6F-B3CD-856E-FB0FB34ECA51}"/>
               </a:ext>
             </a:extLst>
           </p:cNvPr>
@@ -311,7 +311,7 @@
           <a:bodyPr/>
           <a:lstStyle/>
           <a:p>
-            <a:fld id="{820CB0CC-B54E-42F5-AFA5-86C7A7FC4A9C}" type="slidenum">
+            <a:fld id="{D48E4DE2-859F-4B3C-9FA1-A82F1A60F149}" type="slidenum">
               <a:rPr kumimoji="1" lang="ja-JP" altLang="en-US" smtClean="0"/>
               <a:t>‹#›</a:t>
             </a:fld>
@@ -322,7 +322,7 @@
     </p:spTree>
     <p:extLst>
       <p:ext uri="{BB962C8B-B14F-4D97-AF65-F5344CB8AC3E}">
-        <p14:creationId xmlns:p14="http://schemas.microsoft.com/office/powerpoint/2010/main" val="3929053575"/>
+        <p14:creationId xmlns:p14="http://schemas.microsoft.com/office/powerpoint/2010/main" val="3193347833"/>
       </p:ext>
     </p:extLst>
   </p:cSld>
@@ -354,7 +354,7 @@
           <p:cNvPr id="2" name="タイトル 1">
             <a:extLst>
               <a:ext uri="{FF2B5EF4-FFF2-40B4-BE49-F238E27FC236}">
-                <a16:creationId xmlns:a16="http://schemas.microsoft.com/office/drawing/2014/main" id="{33770DD8-7448-FF0E-E546-B43D371B44C5}"/>
+                <a16:creationId xmlns:a16="http://schemas.microsoft.com/office/drawing/2014/main" id="{CDCD6239-0015-CE1C-A1B6-85F7CF1BB13F}"/>
               </a:ext>
             </a:extLst>
           </p:cNvPr>
@@ -382,7 +382,7 @@
           <p:cNvPr id="3" name="縦書きテキスト プレースホルダー 2">
             <a:extLst>
               <a:ext uri="{FF2B5EF4-FFF2-40B4-BE49-F238E27FC236}">
-                <a16:creationId xmlns:a16="http://schemas.microsoft.com/office/drawing/2014/main" id="{46CB528C-31B9-7E4B-E2A5-0A1024907EA8}"/>
+                <a16:creationId xmlns:a16="http://schemas.microsoft.com/office/drawing/2014/main" id="{8B1F186C-DE7C-0D1B-99E8-E61610527C41}"/>
               </a:ext>
             </a:extLst>
           </p:cNvPr>
@@ -471,7 +471,7 @@
           <p:cNvPr id="4" name="日付プレースホルダー 3">
             <a:extLst>
               <a:ext uri="{FF2B5EF4-FFF2-40B4-BE49-F238E27FC236}">
-                <a16:creationId xmlns:a16="http://schemas.microsoft.com/office/drawing/2014/main" id="{2F6E3675-0D1E-F6D5-A094-2175E7CBAA6E}"/>
+                <a16:creationId xmlns:a16="http://schemas.microsoft.com/office/drawing/2014/main" id="{412B7F7A-D2CD-B68A-B3D2-776F599A6E1B}"/>
               </a:ext>
             </a:extLst>
           </p:cNvPr>
@@ -487,7 +487,7 @@
           <a:bodyPr/>
           <a:lstStyle/>
           <a:p>
-            <a:fld id="{62F14CDA-7F90-4E7F-8C43-D97DD14A1558}" type="datetimeFigureOut">
+            <a:fld id="{B3C8292C-6C7C-40C2-9CE5-631942545785}" type="datetimeFigureOut">
               <a:rPr kumimoji="1" lang="ja-JP" altLang="en-US" smtClean="0"/>
               <a:t>2026/7/30</a:t>
             </a:fld>
@@ -500,7 +500,7 @@
           <p:cNvPr id="5" name="フッター プレースホルダー 4">
             <a:extLst>
               <a:ext uri="{FF2B5EF4-FFF2-40B4-BE49-F238E27FC236}">
-                <a16:creationId xmlns:a16="http://schemas.microsoft.com/office/drawing/2014/main" id="{F2AD1C2D-F5CF-CACE-3AAD-72196F71C57B}"/>
+                <a16:creationId xmlns:a16="http://schemas.microsoft.com/office/drawing/2014/main" id="{18A608E6-BB74-91BB-B3E5-756BDCAFF678}"/>
               </a:ext>
             </a:extLst>
           </p:cNvPr>
@@ -525,7 +525,7 @@
           <p:cNvPr id="6" name="スライド番号プレースホルダー 5">
             <a:extLst>
               <a:ext uri="{FF2B5EF4-FFF2-40B4-BE49-F238E27FC236}">
-                <a16:creationId xmlns:a16="http://schemas.microsoft.com/office/drawing/2014/main" id="{CDB286B8-6C1E-DAF8-275E-E6BC62FA2A43}"/>
+                <a16:creationId xmlns:a16="http://schemas.microsoft.com/office/drawing/2014/main" id="{E1919AEF-8504-02B9-4ACE-EA9C19D319C0}"/>
               </a:ext>
             </a:extLst>
           </p:cNvPr>
@@ -541,7 +541,7 @@
           <a:bodyPr/>
           <a:lstStyle/>
           <a:p>
-            <a:fld id="{820CB0CC-B54E-42F5-AFA5-86C7A7FC4A9C}" type="slidenum">
+            <a:fld id="{D48E4DE2-859F-4B3C-9FA1-A82F1A60F149}" type="slidenum">
               <a:rPr kumimoji="1" lang="ja-JP" altLang="en-US" smtClean="0"/>
               <a:t>‹#›</a:t>
             </a:fld>
@@ -552,7 +552,7 @@
     </p:spTree>
     <p:extLst>
       <p:ext uri="{BB962C8B-B14F-4D97-AF65-F5344CB8AC3E}">
-        <p14:creationId xmlns:p14="http://schemas.microsoft.com/office/powerpoint/2010/main" val="2562208460"/>
+        <p14:creationId xmlns:p14="http://schemas.microsoft.com/office/powerpoint/2010/main" val="1635144455"/>
       </p:ext>
     </p:extLst>
   </p:cSld>
@@ -584,7 +584,7 @@
           <p:cNvPr id="2" name="縦書きタイトル 1">
             <a:extLst>
               <a:ext uri="{FF2B5EF4-FFF2-40B4-BE49-F238E27FC236}">
-                <a16:creationId xmlns:a16="http://schemas.microsoft.com/office/drawing/2014/main" id="{C1FDEAFB-5CF4-ABF5-0F46-8B6E021EDF95}"/>
+                <a16:creationId xmlns:a16="http://schemas.microsoft.com/office/drawing/2014/main" id="{8C6BC40F-2898-C24C-3673-2776D9F1CD53}"/>
               </a:ext>
             </a:extLst>
           </p:cNvPr>
@@ -617,7 +617,7 @@
           <p:cNvPr id="3" name="縦書きテキスト プレースホルダー 2">
             <a:extLst>
               <a:ext uri="{FF2B5EF4-FFF2-40B4-BE49-F238E27FC236}">
-                <a16:creationId xmlns:a16="http://schemas.microsoft.com/office/drawing/2014/main" id="{5A282DE2-35B0-0AA0-8F4D-C547664F436B}"/>
+                <a16:creationId xmlns:a16="http://schemas.microsoft.com/office/drawing/2014/main" id="{C15CA1F1-7C3A-44A7-8272-ACACB6A622D7}"/>
               </a:ext>
             </a:extLst>
           </p:cNvPr>
@@ -711,7 +711,7 @@
           <p:cNvPr id="4" name="日付プレースホルダー 3">
             <a:extLst>
               <a:ext uri="{FF2B5EF4-FFF2-40B4-BE49-F238E27FC236}">
-                <a16:creationId xmlns:a16="http://schemas.microsoft.com/office/drawing/2014/main" id="{379CDDCD-980E-1501-F489-366B204C0EFD}"/>
+                <a16:creationId xmlns:a16="http://schemas.microsoft.com/office/drawing/2014/main" id="{0FFA9F0A-9F8A-66B0-BE37-70F8A21EE756}"/>
               </a:ext>
             </a:extLst>
           </p:cNvPr>
@@ -727,7 +727,7 @@
           <a:bodyPr/>
           <a:lstStyle/>
           <a:p>
-            <a:fld id="{62F14CDA-7F90-4E7F-8C43-D97DD14A1558}" type="datetimeFigureOut">
+            <a:fld id="{B3C8292C-6C7C-40C2-9CE5-631942545785}" type="datetimeFigureOut">
               <a:rPr kumimoji="1" lang="ja-JP" altLang="en-US" smtClean="0"/>
               <a:t>2026/7/30</a:t>
             </a:fld>
@@ -740,7 +740,7 @@
           <p:cNvPr id="5" name="フッター プレースホルダー 4">
             <a:extLst>
               <a:ext uri="{FF2B5EF4-FFF2-40B4-BE49-F238E27FC236}">
-                <a16:creationId xmlns:a16="http://schemas.microsoft.com/office/drawing/2014/main" id="{7264681C-A18E-3C31-A1BD-2A05FDD2E549}"/>
+                <a16:creationId xmlns:a16="http://schemas.microsoft.com/office/drawing/2014/main" id="{35C54C21-733B-EF68-1197-01B5D74490A1}"/>
               </a:ext>
             </a:extLst>
           </p:cNvPr>
@@ -765,7 +765,7 @@
           <p:cNvPr id="6" name="スライド番号プレースホルダー 5">
             <a:extLst>
               <a:ext uri="{FF2B5EF4-FFF2-40B4-BE49-F238E27FC236}">
-                <a16:creationId xmlns:a16="http://schemas.microsoft.com/office/drawing/2014/main" id="{08BD3D83-00C1-8D2A-050A-FFF5DF7C2B6A}"/>
+                <a16:creationId xmlns:a16="http://schemas.microsoft.com/office/drawing/2014/main" id="{656AF403-5501-FE9E-967B-A24BCAA9039C}"/>
               </a:ext>
             </a:extLst>
           </p:cNvPr>
@@ -781,7 +781,7 @@
           <a:bodyPr/>
           <a:lstStyle/>
           <a:p>
-            <a:fld id="{820CB0CC-B54E-42F5-AFA5-86C7A7FC4A9C}" type="slidenum">
+            <a:fld id="{D48E4DE2-859F-4B3C-9FA1-A82F1A60F149}" type="slidenum">
               <a:rPr kumimoji="1" lang="ja-JP" altLang="en-US" smtClean="0"/>
               <a:t>‹#›</a:t>
             </a:fld>
@@ -792,7 +792,7 @@
     </p:spTree>
     <p:extLst>
       <p:ext uri="{BB962C8B-B14F-4D97-AF65-F5344CB8AC3E}">
-        <p14:creationId xmlns:p14="http://schemas.microsoft.com/office/powerpoint/2010/main" val="685769649"/>
+        <p14:creationId xmlns:p14="http://schemas.microsoft.com/office/powerpoint/2010/main" val="1569645124"/>
       </p:ext>
     </p:extLst>
   </p:cSld>
@@ -824,7 +824,7 @@
           <p:cNvPr id="2" name="タイトル 1">
             <a:extLst>
               <a:ext uri="{FF2B5EF4-FFF2-40B4-BE49-F238E27FC236}">
-                <a16:creationId xmlns:a16="http://schemas.microsoft.com/office/drawing/2014/main" id="{5111D342-FF6A-0232-1456-1077670FB60F}"/>
+                <a16:creationId xmlns:a16="http://schemas.microsoft.com/office/drawing/2014/main" id="{93012AE8-FBDE-B7BA-BA5C-18C77A542B5D}"/>
               </a:ext>
             </a:extLst>
           </p:cNvPr>
@@ -852,7 +852,7 @@
           <p:cNvPr id="3" name="コンテンツ プレースホルダー 2">
             <a:extLst>
               <a:ext uri="{FF2B5EF4-FFF2-40B4-BE49-F238E27FC236}">
-                <a16:creationId xmlns:a16="http://schemas.microsoft.com/office/drawing/2014/main" id="{32E783C0-3487-F9AA-4646-518573DB1DA1}"/>
+                <a16:creationId xmlns:a16="http://schemas.microsoft.com/office/drawing/2014/main" id="{D9EB3D05-C866-5B09-6EA3-B11C54F26ADF}"/>
               </a:ext>
             </a:extLst>
           </p:cNvPr>
@@ -941,7 +941,7 @@
           <p:cNvPr id="4" name="日付プレースホルダー 3">
             <a:extLst>
               <a:ext uri="{FF2B5EF4-FFF2-40B4-BE49-F238E27FC236}">
-                <a16:creationId xmlns:a16="http://schemas.microsoft.com/office/drawing/2014/main" id="{ED1BB962-1B99-648F-A274-B0982D5609CC}"/>
+                <a16:creationId xmlns:a16="http://schemas.microsoft.com/office/drawing/2014/main" id="{E97300FD-96A3-DEE6-206C-6A0286E1DE5E}"/>
               </a:ext>
             </a:extLst>
           </p:cNvPr>
@@ -957,7 +957,7 @@
           <a:bodyPr/>
           <a:lstStyle/>
           <a:p>
-            <a:fld id="{62F14CDA-7F90-4E7F-8C43-D97DD14A1558}" type="datetimeFigureOut">
+            <a:fld id="{B3C8292C-6C7C-40C2-9CE5-631942545785}" type="datetimeFigureOut">
               <a:rPr kumimoji="1" lang="ja-JP" altLang="en-US" smtClean="0"/>
               <a:t>2026/7/30</a:t>
             </a:fld>
@@ -970,7 +970,7 @@
           <p:cNvPr id="5" name="フッター プレースホルダー 4">
             <a:extLst>
               <a:ext uri="{FF2B5EF4-FFF2-40B4-BE49-F238E27FC236}">
-                <a16:creationId xmlns:a16="http://schemas.microsoft.com/office/drawing/2014/main" id="{A6B1C0C2-2BB3-61F3-C9D8-A785D6B6D890}"/>
+                <a16:creationId xmlns:a16="http://schemas.microsoft.com/office/drawing/2014/main" id="{AECC9934-60DC-7DBA-0275-D88D03742E95}"/>
               </a:ext>
             </a:extLst>
           </p:cNvPr>
@@ -995,7 +995,7 @@
           <p:cNvPr id="6" name="スライド番号プレースホルダー 5">
             <a:extLst>
               <a:ext uri="{FF2B5EF4-FFF2-40B4-BE49-F238E27FC236}">
-                <a16:creationId xmlns:a16="http://schemas.microsoft.com/office/drawing/2014/main" id="{F938BE34-CFDC-2C60-AFBB-540AF116AE85}"/>
+                <a16:creationId xmlns:a16="http://schemas.microsoft.com/office/drawing/2014/main" id="{84952775-21E7-07EE-CBA0-16F369BC3D2D}"/>
               </a:ext>
             </a:extLst>
           </p:cNvPr>
@@ -1011,7 +1011,7 @@
           <a:bodyPr/>
           <a:lstStyle/>
           <a:p>
-            <a:fld id="{820CB0CC-B54E-42F5-AFA5-86C7A7FC4A9C}" type="slidenum">
+            <a:fld id="{D48E4DE2-859F-4B3C-9FA1-A82F1A60F149}" type="slidenum">
               <a:rPr kumimoji="1" lang="ja-JP" altLang="en-US" smtClean="0"/>
               <a:t>‹#›</a:t>
             </a:fld>
@@ -1022,7 +1022,7 @@
     </p:spTree>
     <p:extLst>
       <p:ext uri="{BB962C8B-B14F-4D97-AF65-F5344CB8AC3E}">
-        <p14:creationId xmlns:p14="http://schemas.microsoft.com/office/powerpoint/2010/main" val="2989780259"/>
+        <p14:creationId xmlns:p14="http://schemas.microsoft.com/office/powerpoint/2010/main" val="539541276"/>
       </p:ext>
     </p:extLst>
   </p:cSld>
@@ -1054,7 +1054,7 @@
           <p:cNvPr id="2" name="タイトル 1">
             <a:extLst>
               <a:ext uri="{FF2B5EF4-FFF2-40B4-BE49-F238E27FC236}">
-                <a16:creationId xmlns:a16="http://schemas.microsoft.com/office/drawing/2014/main" id="{5B5FBEFE-5244-7965-2919-F9F30EC26D60}"/>
+                <a16:creationId xmlns:a16="http://schemas.microsoft.com/office/drawing/2014/main" id="{6FB60689-F5CC-477D-6CE3-89EC00A8CB38}"/>
               </a:ext>
             </a:extLst>
           </p:cNvPr>
@@ -1091,7 +1091,7 @@
           <p:cNvPr id="3" name="テキスト プレースホルダー 2">
             <a:extLst>
               <a:ext uri="{FF2B5EF4-FFF2-40B4-BE49-F238E27FC236}">
-                <a16:creationId xmlns:a16="http://schemas.microsoft.com/office/drawing/2014/main" id="{AE570DFA-9A5D-E692-1203-0F119093C555}"/>
+                <a16:creationId xmlns:a16="http://schemas.microsoft.com/office/drawing/2014/main" id="{204BD2FF-C99E-3BF2-41B1-F10FD31C1A72}"/>
               </a:ext>
             </a:extLst>
           </p:cNvPr>
@@ -1216,7 +1216,7 @@
           <p:cNvPr id="4" name="日付プレースホルダー 3">
             <a:extLst>
               <a:ext uri="{FF2B5EF4-FFF2-40B4-BE49-F238E27FC236}">
-                <a16:creationId xmlns:a16="http://schemas.microsoft.com/office/drawing/2014/main" id="{952691A3-5C72-78A7-0523-60AF9F623EBF}"/>
+                <a16:creationId xmlns:a16="http://schemas.microsoft.com/office/drawing/2014/main" id="{BA2E56E9-394F-14BF-27DD-FF418A62A8C3}"/>
               </a:ext>
             </a:extLst>
           </p:cNvPr>
@@ -1232,7 +1232,7 @@
           <a:bodyPr/>
           <a:lstStyle/>
           <a:p>
-            <a:fld id="{62F14CDA-7F90-4E7F-8C43-D97DD14A1558}" type="datetimeFigureOut">
+            <a:fld id="{B3C8292C-6C7C-40C2-9CE5-631942545785}" type="datetimeFigureOut">
               <a:rPr kumimoji="1" lang="ja-JP" altLang="en-US" smtClean="0"/>
               <a:t>2026/7/30</a:t>
             </a:fld>
@@ -1245,7 +1245,7 @@
           <p:cNvPr id="5" name="フッター プレースホルダー 4">
             <a:extLst>
               <a:ext uri="{FF2B5EF4-FFF2-40B4-BE49-F238E27FC236}">
-                <a16:creationId xmlns:a16="http://schemas.microsoft.com/office/drawing/2014/main" id="{5F5A4A9C-ADF9-5C84-ADC3-D59F1552AFB6}"/>
+                <a16:creationId xmlns:a16="http://schemas.microsoft.com/office/drawing/2014/main" id="{1C864C97-0058-7D44-F990-0FACE1F54436}"/>
               </a:ext>
             </a:extLst>
           </p:cNvPr>
@@ -1270,7 +1270,7 @@
           <p:cNvPr id="6" name="スライド番号プレースホルダー 5">
             <a:extLst>
               <a:ext uri="{FF2B5EF4-FFF2-40B4-BE49-F238E27FC236}">
-                <a16:creationId xmlns:a16="http://schemas.microsoft.com/office/drawing/2014/main" id="{D4F16B62-17C7-795E-B2C0-BB14A2DFFC14}"/>
+                <a16:creationId xmlns:a16="http://schemas.microsoft.com/office/drawing/2014/main" id="{0CCDDF3D-2E38-EEFF-D09E-917891600327}"/>
               </a:ext>
             </a:extLst>
           </p:cNvPr>
@@ -1286,7 +1286,7 @@
           <a:bodyPr/>
           <a:lstStyle/>
           <a:p>
-            <a:fld id="{820CB0CC-B54E-42F5-AFA5-86C7A7FC4A9C}" type="slidenum">
+            <a:fld id="{D48E4DE2-859F-4B3C-9FA1-A82F1A60F149}" type="slidenum">
               <a:rPr kumimoji="1" lang="ja-JP" altLang="en-US" smtClean="0"/>
               <a:t>‹#›</a:t>
             </a:fld>
@@ -1297,7 +1297,7 @@
     </p:spTree>
     <p:extLst>
       <p:ext uri="{BB962C8B-B14F-4D97-AF65-F5344CB8AC3E}">
-        <p14:creationId xmlns:p14="http://schemas.microsoft.com/office/powerpoint/2010/main" val="323157070"/>
+        <p14:creationId xmlns:p14="http://schemas.microsoft.com/office/powerpoint/2010/main" val="3078393947"/>
       </p:ext>
     </p:extLst>
   </p:cSld>
@@ -1329,7 +1329,7 @@
           <p:cNvPr id="2" name="タイトル 1">
             <a:extLst>
               <a:ext uri="{FF2B5EF4-FFF2-40B4-BE49-F238E27FC236}">
-                <a16:creationId xmlns:a16="http://schemas.microsoft.com/office/drawing/2014/main" id="{66C1E099-A319-66B4-2F08-B7392A32E3AA}"/>
+                <a16:creationId xmlns:a16="http://schemas.microsoft.com/office/drawing/2014/main" id="{12EBC2C8-9AE2-56B5-D01A-5606DA848D92}"/>
               </a:ext>
             </a:extLst>
           </p:cNvPr>
@@ -1357,7 +1357,7 @@
           <p:cNvPr id="3" name="コンテンツ プレースホルダー 2">
             <a:extLst>
               <a:ext uri="{FF2B5EF4-FFF2-40B4-BE49-F238E27FC236}">
-                <a16:creationId xmlns:a16="http://schemas.microsoft.com/office/drawing/2014/main" id="{932DC973-3459-72DD-9933-C887083168BA}"/>
+                <a16:creationId xmlns:a16="http://schemas.microsoft.com/office/drawing/2014/main" id="{F747BC12-CFB8-61E7-E54D-BDA7F9B7D3F3}"/>
               </a:ext>
             </a:extLst>
           </p:cNvPr>
@@ -1451,7 +1451,7 @@
           <p:cNvPr id="4" name="コンテンツ プレースホルダー 3">
             <a:extLst>
               <a:ext uri="{FF2B5EF4-FFF2-40B4-BE49-F238E27FC236}">
-                <a16:creationId xmlns:a16="http://schemas.microsoft.com/office/drawing/2014/main" id="{0A978BE5-9245-DC64-84B2-AB6A78ADF08D}"/>
+                <a16:creationId xmlns:a16="http://schemas.microsoft.com/office/drawing/2014/main" id="{C1AE6901-D81B-B406-2529-266ACF88AB25}"/>
               </a:ext>
             </a:extLst>
           </p:cNvPr>
@@ -1545,7 +1545,7 @@
           <p:cNvPr id="5" name="日付プレースホルダー 4">
             <a:extLst>
               <a:ext uri="{FF2B5EF4-FFF2-40B4-BE49-F238E27FC236}">
-                <a16:creationId xmlns:a16="http://schemas.microsoft.com/office/drawing/2014/main" id="{E6D2350B-94C2-031C-6D7C-0C9E1ECD3B9A}"/>
+                <a16:creationId xmlns:a16="http://schemas.microsoft.com/office/drawing/2014/main" id="{1B9510A1-CB3D-8CA7-2791-8AA8859C8A38}"/>
               </a:ext>
             </a:extLst>
           </p:cNvPr>
@@ -1561,7 +1561,7 @@
           <a:bodyPr/>
           <a:lstStyle/>
           <a:p>
-            <a:fld id="{62F14CDA-7F90-4E7F-8C43-D97DD14A1558}" type="datetimeFigureOut">
+            <a:fld id="{B3C8292C-6C7C-40C2-9CE5-631942545785}" type="datetimeFigureOut">
               <a:rPr kumimoji="1" lang="ja-JP" altLang="en-US" smtClean="0"/>
               <a:t>2026/7/30</a:t>
             </a:fld>
@@ -1574,7 +1574,7 @@
           <p:cNvPr id="6" name="フッター プレースホルダー 5">
             <a:extLst>
               <a:ext uri="{FF2B5EF4-FFF2-40B4-BE49-F238E27FC236}">
-                <a16:creationId xmlns:a16="http://schemas.microsoft.com/office/drawing/2014/main" id="{314DC420-26D3-A00C-8047-19620A97A57A}"/>
+                <a16:creationId xmlns:a16="http://schemas.microsoft.com/office/drawing/2014/main" id="{5E816A6D-042F-CB64-321D-94B2E5146C86}"/>
               </a:ext>
             </a:extLst>
           </p:cNvPr>
@@ -1599,7 +1599,7 @@
           <p:cNvPr id="7" name="スライド番号プレースホルダー 6">
             <a:extLst>
               <a:ext uri="{FF2B5EF4-FFF2-40B4-BE49-F238E27FC236}">
-                <a16:creationId xmlns:a16="http://schemas.microsoft.com/office/drawing/2014/main" id="{34FE4EBE-9A96-62AF-0D64-A0C709CB14C8}"/>
+                <a16:creationId xmlns:a16="http://schemas.microsoft.com/office/drawing/2014/main" id="{60D2FE00-C94B-A09C-A598-758559B21DCE}"/>
               </a:ext>
             </a:extLst>
           </p:cNvPr>
@@ -1615,7 +1615,7 @@
           <a:bodyPr/>
           <a:lstStyle/>
           <a:p>
-            <a:fld id="{820CB0CC-B54E-42F5-AFA5-86C7A7FC4A9C}" type="slidenum">
+            <a:fld id="{D48E4DE2-859F-4B3C-9FA1-A82F1A60F149}" type="slidenum">
               <a:rPr kumimoji="1" lang="ja-JP" altLang="en-US" smtClean="0"/>
               <a:t>‹#›</a:t>
             </a:fld>
@@ -1626,7 +1626,7 @@
     </p:spTree>
     <p:extLst>
       <p:ext uri="{BB962C8B-B14F-4D97-AF65-F5344CB8AC3E}">
-        <p14:creationId xmlns:p14="http://schemas.microsoft.com/office/powerpoint/2010/main" val="2748233168"/>
+        <p14:creationId xmlns:p14="http://schemas.microsoft.com/office/powerpoint/2010/main" val="2072802477"/>
       </p:ext>
     </p:extLst>
   </p:cSld>
@@ -1658,7 +1658,7 @@
           <p:cNvPr id="2" name="タイトル 1">
             <a:extLst>
               <a:ext uri="{FF2B5EF4-FFF2-40B4-BE49-F238E27FC236}">
-                <a16:creationId xmlns:a16="http://schemas.microsoft.com/office/drawing/2014/main" id="{C9D26F41-4CE3-FCD4-FC31-DF6A69D95F4C}"/>
+                <a16:creationId xmlns:a16="http://schemas.microsoft.com/office/drawing/2014/main" id="{22429E79-03CB-E9D8-02C8-4BF18AB01E71}"/>
               </a:ext>
             </a:extLst>
           </p:cNvPr>
@@ -1691,7 +1691,7 @@
           <p:cNvPr id="3" name="テキスト プレースホルダー 2">
             <a:extLst>
               <a:ext uri="{FF2B5EF4-FFF2-40B4-BE49-F238E27FC236}">
-                <a16:creationId xmlns:a16="http://schemas.microsoft.com/office/drawing/2014/main" id="{DAE9147F-E42C-6F17-AA3F-13D146C8E76D}"/>
+                <a16:creationId xmlns:a16="http://schemas.microsoft.com/office/drawing/2014/main" id="{748BCAEC-2805-BDBC-ADB9-4A2D1097DE98}"/>
               </a:ext>
             </a:extLst>
           </p:cNvPr>
@@ -1762,7 +1762,7 @@
           <p:cNvPr id="4" name="コンテンツ プレースホルダー 3">
             <a:extLst>
               <a:ext uri="{FF2B5EF4-FFF2-40B4-BE49-F238E27FC236}">
-                <a16:creationId xmlns:a16="http://schemas.microsoft.com/office/drawing/2014/main" id="{BD03A910-CF8B-BB7A-B7CD-89CAFAA1A0CA}"/>
+                <a16:creationId xmlns:a16="http://schemas.microsoft.com/office/drawing/2014/main" id="{EF38A3F6-0999-C520-A265-CFAE7BD3E2E7}"/>
               </a:ext>
             </a:extLst>
           </p:cNvPr>
@@ -1856,7 +1856,7 @@
           <p:cNvPr id="5" name="テキスト プレースホルダー 4">
             <a:extLst>
               <a:ext uri="{FF2B5EF4-FFF2-40B4-BE49-F238E27FC236}">
-                <a16:creationId xmlns:a16="http://schemas.microsoft.com/office/drawing/2014/main" id="{D4FAF227-6520-2CB1-AE9F-A269DAA198E3}"/>
+                <a16:creationId xmlns:a16="http://schemas.microsoft.com/office/drawing/2014/main" id="{0D8B7A2F-517A-94C8-EDEC-7E14B0F5BA8B}"/>
               </a:ext>
             </a:extLst>
           </p:cNvPr>
@@ -1927,7 +1927,7 @@
           <p:cNvPr id="6" name="コンテンツ プレースホルダー 5">
             <a:extLst>
               <a:ext uri="{FF2B5EF4-FFF2-40B4-BE49-F238E27FC236}">
-                <a16:creationId xmlns:a16="http://schemas.microsoft.com/office/drawing/2014/main" id="{70B9B9F0-8DBF-1B31-B96A-B28461BF1839}"/>
+                <a16:creationId xmlns:a16="http://schemas.microsoft.com/office/drawing/2014/main" id="{52C2D615-6145-DC1D-26E6-1D4880D813A8}"/>
               </a:ext>
             </a:extLst>
           </p:cNvPr>
@@ -2021,7 +2021,7 @@
           <p:cNvPr id="7" name="日付プレースホルダー 6">
             <a:extLst>
               <a:ext uri="{FF2B5EF4-FFF2-40B4-BE49-F238E27FC236}">
-                <a16:creationId xmlns:a16="http://schemas.microsoft.com/office/drawing/2014/main" id="{E9AE48A5-2F2C-1D3D-419E-C159B26B8503}"/>
+                <a16:creationId xmlns:a16="http://schemas.microsoft.com/office/drawing/2014/main" id="{2FF29149-7266-0DBF-1FE3-310065C058AD}"/>
               </a:ext>
             </a:extLst>
           </p:cNvPr>
@@ -2037,7 +2037,7 @@
           <a:bodyPr/>
           <a:lstStyle/>
           <a:p>
-            <a:fld id="{62F14CDA-7F90-4E7F-8C43-D97DD14A1558}" type="datetimeFigureOut">
+            <a:fld id="{B3C8292C-6C7C-40C2-9CE5-631942545785}" type="datetimeFigureOut">
               <a:rPr kumimoji="1" lang="ja-JP" altLang="en-US" smtClean="0"/>
               <a:t>2026/7/30</a:t>
             </a:fld>
@@ -2050,7 +2050,7 @@
           <p:cNvPr id="8" name="フッター プレースホルダー 7">
             <a:extLst>
               <a:ext uri="{FF2B5EF4-FFF2-40B4-BE49-F238E27FC236}">
-                <a16:creationId xmlns:a16="http://schemas.microsoft.com/office/drawing/2014/main" id="{14D7D674-95D6-5C5D-78DD-A375FC9BB8CE}"/>
+                <a16:creationId xmlns:a16="http://schemas.microsoft.com/office/drawing/2014/main" id="{AB7DBDDF-948D-9A8C-F61C-7381AC409D8D}"/>
               </a:ext>
             </a:extLst>
           </p:cNvPr>
@@ -2075,7 +2075,7 @@
           <p:cNvPr id="9" name="スライド番号プレースホルダー 8">
             <a:extLst>
               <a:ext uri="{FF2B5EF4-FFF2-40B4-BE49-F238E27FC236}">
-                <a16:creationId xmlns:a16="http://schemas.microsoft.com/office/drawing/2014/main" id="{75972764-F40C-9089-DDF8-B3C40836F49C}"/>
+                <a16:creationId xmlns:a16="http://schemas.microsoft.com/office/drawing/2014/main" id="{6A49F5BF-AE0F-3587-9E92-1390A98583B9}"/>
               </a:ext>
             </a:extLst>
           </p:cNvPr>
@@ -2091,7 +2091,7 @@
           <a:bodyPr/>
           <a:lstStyle/>
           <a:p>
-            <a:fld id="{820CB0CC-B54E-42F5-AFA5-86C7A7FC4A9C}" type="slidenum">
+            <a:fld id="{D48E4DE2-859F-4B3C-9FA1-A82F1A60F149}" type="slidenum">
               <a:rPr kumimoji="1" lang="ja-JP" altLang="en-US" smtClean="0"/>
               <a:t>‹#›</a:t>
             </a:fld>
@@ -2102,7 +2102,7 @@
     </p:spTree>
     <p:extLst>
       <p:ext uri="{BB962C8B-B14F-4D97-AF65-F5344CB8AC3E}">
-        <p14:creationId xmlns:p14="http://schemas.microsoft.com/office/powerpoint/2010/main" val="4253113355"/>
+        <p14:creationId xmlns:p14="http://schemas.microsoft.com/office/powerpoint/2010/main" val="1219809883"/>
       </p:ext>
     </p:extLst>
   </p:cSld>
@@ -2134,7 +2134,7 @@
           <p:cNvPr id="2" name="タイトル 1">
             <a:extLst>
               <a:ext uri="{FF2B5EF4-FFF2-40B4-BE49-F238E27FC236}">
-                <a16:creationId xmlns:a16="http://schemas.microsoft.com/office/drawing/2014/main" id="{2151F351-F52A-0B02-698D-8CE17C9FD297}"/>
+                <a16:creationId xmlns:a16="http://schemas.microsoft.com/office/drawing/2014/main" id="{9B25FFAD-E4C9-44C5-FD6E-0EE8A27189C8}"/>
               </a:ext>
             </a:extLst>
           </p:cNvPr>
@@ -2162,7 +2162,7 @@
           <p:cNvPr id="3" name="日付プレースホルダー 2">
             <a:extLst>
               <a:ext uri="{FF2B5EF4-FFF2-40B4-BE49-F238E27FC236}">
-                <a16:creationId xmlns:a16="http://schemas.microsoft.com/office/drawing/2014/main" id="{2A3EFDA4-EC31-E9E6-0634-A75E9B7B2EED}"/>
+                <a16:creationId xmlns:a16="http://schemas.microsoft.com/office/drawing/2014/main" id="{B982F9D9-C34D-27A6-71C2-CC87368FC1EE}"/>
               </a:ext>
             </a:extLst>
           </p:cNvPr>
@@ -2178,7 +2178,7 @@
           <a:bodyPr/>
           <a:lstStyle/>
           <a:p>
-            <a:fld id="{62F14CDA-7F90-4E7F-8C43-D97DD14A1558}" type="datetimeFigureOut">
+            <a:fld id="{B3C8292C-6C7C-40C2-9CE5-631942545785}" type="datetimeFigureOut">
               <a:rPr kumimoji="1" lang="ja-JP" altLang="en-US" smtClean="0"/>
               <a:t>2026/7/30</a:t>
             </a:fld>
@@ -2191,7 +2191,7 @@
           <p:cNvPr id="4" name="フッター プレースホルダー 3">
             <a:extLst>
               <a:ext uri="{FF2B5EF4-FFF2-40B4-BE49-F238E27FC236}">
-                <a16:creationId xmlns:a16="http://schemas.microsoft.com/office/drawing/2014/main" id="{F53B4B61-8915-D3D2-4989-3D23677F5B98}"/>
+                <a16:creationId xmlns:a16="http://schemas.microsoft.com/office/drawing/2014/main" id="{9417F9D5-FCD2-7124-A382-CEB992D25A76}"/>
               </a:ext>
             </a:extLst>
           </p:cNvPr>
@@ -2216,7 +2216,7 @@
           <p:cNvPr id="5" name="スライド番号プレースホルダー 4">
             <a:extLst>
               <a:ext uri="{FF2B5EF4-FFF2-40B4-BE49-F238E27FC236}">
-                <a16:creationId xmlns:a16="http://schemas.microsoft.com/office/drawing/2014/main" id="{AC8C52FC-06E3-F99C-376F-B30C4924C83D}"/>
+                <a16:creationId xmlns:a16="http://schemas.microsoft.com/office/drawing/2014/main" id="{8092C925-65A9-6C88-45D1-C0B7EBA76964}"/>
               </a:ext>
             </a:extLst>
           </p:cNvPr>
@@ -2232,7 +2232,7 @@
           <a:bodyPr/>
           <a:lstStyle/>
           <a:p>
-            <a:fld id="{820CB0CC-B54E-42F5-AFA5-86C7A7FC4A9C}" type="slidenum">
+            <a:fld id="{D48E4DE2-859F-4B3C-9FA1-A82F1A60F149}" type="slidenum">
               <a:rPr kumimoji="1" lang="ja-JP" altLang="en-US" smtClean="0"/>
               <a:t>‹#›</a:t>
             </a:fld>
@@ -2243,7 +2243,7 @@
     </p:spTree>
     <p:extLst>
       <p:ext uri="{BB962C8B-B14F-4D97-AF65-F5344CB8AC3E}">
-        <p14:creationId xmlns:p14="http://schemas.microsoft.com/office/powerpoint/2010/main" val="1172390118"/>
+        <p14:creationId xmlns:p14="http://schemas.microsoft.com/office/powerpoint/2010/main" val="3639950964"/>
       </p:ext>
     </p:extLst>
   </p:cSld>
@@ -2275,7 +2275,7 @@
           <p:cNvPr id="2" name="日付プレースホルダー 1">
             <a:extLst>
               <a:ext uri="{FF2B5EF4-FFF2-40B4-BE49-F238E27FC236}">
-                <a16:creationId xmlns:a16="http://schemas.microsoft.com/office/drawing/2014/main" id="{19726BF0-F595-70BF-25C6-308DF168C0CF}"/>
+                <a16:creationId xmlns:a16="http://schemas.microsoft.com/office/drawing/2014/main" id="{35DA34E4-9A2A-31FF-FB94-39940D4A2B3F}"/>
               </a:ext>
             </a:extLst>
           </p:cNvPr>
@@ -2291,7 +2291,7 @@
           <a:bodyPr/>
           <a:lstStyle/>
           <a:p>
-            <a:fld id="{62F14CDA-7F90-4E7F-8C43-D97DD14A1558}" type="datetimeFigureOut">
+            <a:fld id="{B3C8292C-6C7C-40C2-9CE5-631942545785}" type="datetimeFigureOut">
               <a:rPr kumimoji="1" lang="ja-JP" altLang="en-US" smtClean="0"/>
               <a:t>2026/7/30</a:t>
             </a:fld>
@@ -2304,7 +2304,7 @@
           <p:cNvPr id="3" name="フッター プレースホルダー 2">
             <a:extLst>
               <a:ext uri="{FF2B5EF4-FFF2-40B4-BE49-F238E27FC236}">
-                <a16:creationId xmlns:a16="http://schemas.microsoft.com/office/drawing/2014/main" id="{E499C8DE-FD72-88D6-BF33-4EB54A6FF4F9}"/>
+                <a16:creationId xmlns:a16="http://schemas.microsoft.com/office/drawing/2014/main" id="{FF5F8820-E7F9-867E-F439-215F37DDB669}"/>
               </a:ext>
             </a:extLst>
           </p:cNvPr>
@@ -2329,7 +2329,7 @@
           <p:cNvPr id="4" name="スライド番号プレースホルダー 3">
             <a:extLst>
               <a:ext uri="{FF2B5EF4-FFF2-40B4-BE49-F238E27FC236}">
-                <a16:creationId xmlns:a16="http://schemas.microsoft.com/office/drawing/2014/main" id="{1A91236E-4A64-1618-1FCF-456A348C2839}"/>
+                <a16:creationId xmlns:a16="http://schemas.microsoft.com/office/drawing/2014/main" id="{8BC5D0C7-E390-8FD8-44A9-39C9138398A2}"/>
               </a:ext>
             </a:extLst>
           </p:cNvPr>
@@ -2345,7 +2345,7 @@
           <a:bodyPr/>
           <a:lstStyle/>
           <a:p>
-            <a:fld id="{820CB0CC-B54E-42F5-AFA5-86C7A7FC4A9C}" type="slidenum">
+            <a:fld id="{D48E4DE2-859F-4B3C-9FA1-A82F1A60F149}" type="slidenum">
               <a:rPr kumimoji="1" lang="ja-JP" altLang="en-US" smtClean="0"/>
               <a:t>‹#›</a:t>
             </a:fld>
@@ -2356,7 +2356,7 @@
     </p:spTree>
     <p:extLst>
       <p:ext uri="{BB962C8B-B14F-4D97-AF65-F5344CB8AC3E}">
-        <p14:creationId xmlns:p14="http://schemas.microsoft.com/office/powerpoint/2010/main" val="1320030826"/>
+        <p14:creationId xmlns:p14="http://schemas.microsoft.com/office/powerpoint/2010/main" val="2612381024"/>
       </p:ext>
     </p:extLst>
   </p:cSld>
@@ -2388,7 +2388,7 @@
           <p:cNvPr id="2" name="タイトル 1">
             <a:extLst>
               <a:ext uri="{FF2B5EF4-FFF2-40B4-BE49-F238E27FC236}">
-                <a16:creationId xmlns:a16="http://schemas.microsoft.com/office/drawing/2014/main" id="{98AC60A3-8DE8-57D7-6C36-7B69A15EDA86}"/>
+                <a16:creationId xmlns:a16="http://schemas.microsoft.com/office/drawing/2014/main" id="{13007B8C-9F47-80D3-BE9F-487A94155994}"/>
               </a:ext>
             </a:extLst>
           </p:cNvPr>
@@ -2425,7 +2425,7 @@
           <p:cNvPr id="3" name="コンテンツ プレースホルダー 2">
             <a:extLst>
               <a:ext uri="{FF2B5EF4-FFF2-40B4-BE49-F238E27FC236}">
-                <a16:creationId xmlns:a16="http://schemas.microsoft.com/office/drawing/2014/main" id="{D863282A-BE4E-E8B6-5749-E431EA049393}"/>
+                <a16:creationId xmlns:a16="http://schemas.microsoft.com/office/drawing/2014/main" id="{19D4D0A6-D67A-E6DC-0BE1-DA6A41CBA3EA}"/>
               </a:ext>
             </a:extLst>
           </p:cNvPr>
@@ -2547,7 +2547,7 @@
           <p:cNvPr id="4" name="テキスト プレースホルダー 3">
             <a:extLst>
               <a:ext uri="{FF2B5EF4-FFF2-40B4-BE49-F238E27FC236}">
-                <a16:creationId xmlns:a16="http://schemas.microsoft.com/office/drawing/2014/main" id="{DD1A3D21-09FD-C850-8E8A-53EBB1B8D7A9}"/>
+                <a16:creationId xmlns:a16="http://schemas.microsoft.com/office/drawing/2014/main" id="{1895831B-71EA-E7CD-2AF4-75011C43B954}"/>
               </a:ext>
             </a:extLst>
           </p:cNvPr>
@@ -2618,7 +2618,7 @@
           <p:cNvPr id="5" name="日付プレースホルダー 4">
             <a:extLst>
               <a:ext uri="{FF2B5EF4-FFF2-40B4-BE49-F238E27FC236}">
-                <a16:creationId xmlns:a16="http://schemas.microsoft.com/office/drawing/2014/main" id="{2E56D9B4-99B3-3D6C-FE6D-C7778063B0E7}"/>
+                <a16:creationId xmlns:a16="http://schemas.microsoft.com/office/drawing/2014/main" id="{DF0EFAA0-F151-AC0A-7AC5-C748F2E86D02}"/>
               </a:ext>
             </a:extLst>
           </p:cNvPr>
@@ -2634,7 +2634,7 @@
           <a:bodyPr/>
           <a:lstStyle/>
           <a:p>
-            <a:fld id="{62F14CDA-7F90-4E7F-8C43-D97DD14A1558}" type="datetimeFigureOut">
+            <a:fld id="{B3C8292C-6C7C-40C2-9CE5-631942545785}" type="datetimeFigureOut">
               <a:rPr kumimoji="1" lang="ja-JP" altLang="en-US" smtClean="0"/>
               <a:t>2026/7/30</a:t>
             </a:fld>
@@ -2647,7 +2647,7 @@
           <p:cNvPr id="6" name="フッター プレースホルダー 5">
             <a:extLst>
               <a:ext uri="{FF2B5EF4-FFF2-40B4-BE49-F238E27FC236}">
-                <a16:creationId xmlns:a16="http://schemas.microsoft.com/office/drawing/2014/main" id="{D717C1C2-E98F-D4A6-E8F5-458DED839D2B}"/>
+                <a16:creationId xmlns:a16="http://schemas.microsoft.com/office/drawing/2014/main" id="{48E4E16D-773A-D9B1-1CA4-906E299B5F91}"/>
               </a:ext>
             </a:extLst>
           </p:cNvPr>
@@ -2672,7 +2672,7 @@
           <p:cNvPr id="7" name="スライド番号プレースホルダー 6">
             <a:extLst>
               <a:ext uri="{FF2B5EF4-FFF2-40B4-BE49-F238E27FC236}">
-                <a16:creationId xmlns:a16="http://schemas.microsoft.com/office/drawing/2014/main" id="{68498DBE-4770-AB46-9D4D-5C0ECBCBA766}"/>
+                <a16:creationId xmlns:a16="http://schemas.microsoft.com/office/drawing/2014/main" id="{68FF1F24-4D10-D60E-277E-2A457B15359E}"/>
               </a:ext>
             </a:extLst>
           </p:cNvPr>
@@ -2688,7 +2688,7 @@
           <a:bodyPr/>
           <a:lstStyle/>
           <a:p>
-            <a:fld id="{820CB0CC-B54E-42F5-AFA5-86C7A7FC4A9C}" type="slidenum">
+            <a:fld id="{D48E4DE2-859F-4B3C-9FA1-A82F1A60F149}" type="slidenum">
               <a:rPr kumimoji="1" lang="ja-JP" altLang="en-US" smtClean="0"/>
               <a:t>‹#›</a:t>
             </a:fld>
@@ -2699,7 +2699,7 @@
     </p:spTree>
     <p:extLst>
       <p:ext uri="{BB962C8B-B14F-4D97-AF65-F5344CB8AC3E}">
-        <p14:creationId xmlns:p14="http://schemas.microsoft.com/office/powerpoint/2010/main" val="861746876"/>
+        <p14:creationId xmlns:p14="http://schemas.microsoft.com/office/powerpoint/2010/main" val="957434075"/>
       </p:ext>
     </p:extLst>
   </p:cSld>
@@ -2731,7 +2731,7 @@
           <p:cNvPr id="2" name="タイトル 1">
             <a:extLst>
               <a:ext uri="{FF2B5EF4-FFF2-40B4-BE49-F238E27FC236}">
-                <a16:creationId xmlns:a16="http://schemas.microsoft.com/office/drawing/2014/main" id="{F458CDF2-CCBC-37EC-4097-FB525C570B9C}"/>
+                <a16:creationId xmlns:a16="http://schemas.microsoft.com/office/drawing/2014/main" id="{CA3B0311-FBFB-221F-7B59-3D1ACEFDC333}"/>
               </a:ext>
             </a:extLst>
           </p:cNvPr>
@@ -2768,7 +2768,7 @@
           <p:cNvPr id="3" name="図プレースホルダー 2">
             <a:extLst>
               <a:ext uri="{FF2B5EF4-FFF2-40B4-BE49-F238E27FC236}">
-                <a16:creationId xmlns:a16="http://schemas.microsoft.com/office/drawing/2014/main" id="{6591CAE1-9779-76A1-98F2-E428C5B0C5BD}"/>
+                <a16:creationId xmlns:a16="http://schemas.microsoft.com/office/drawing/2014/main" id="{4290D6FA-333D-C502-5FAB-E9B77E7CC160}"/>
               </a:ext>
             </a:extLst>
           </p:cNvPr>
@@ -2835,7 +2835,7 @@
           <p:cNvPr id="4" name="テキスト プレースホルダー 3">
             <a:extLst>
               <a:ext uri="{FF2B5EF4-FFF2-40B4-BE49-F238E27FC236}">
-                <a16:creationId xmlns:a16="http://schemas.microsoft.com/office/drawing/2014/main" id="{70F8FA6B-3E97-9917-2DC0-9BE9FC3E220F}"/>
+                <a16:creationId xmlns:a16="http://schemas.microsoft.com/office/drawing/2014/main" id="{8F9152FC-0621-BD02-5F34-B54F1A60AC22}"/>
               </a:ext>
             </a:extLst>
           </p:cNvPr>
@@ -2906,7 +2906,7 @@
           <p:cNvPr id="5" name="日付プレースホルダー 4">
             <a:extLst>
               <a:ext uri="{FF2B5EF4-FFF2-40B4-BE49-F238E27FC236}">
-                <a16:creationId xmlns:a16="http://schemas.microsoft.com/office/drawing/2014/main" id="{0C6E9AE4-094E-8D91-8611-A14407F22561}"/>
+                <a16:creationId xmlns:a16="http://schemas.microsoft.com/office/drawing/2014/main" id="{B181EB06-3DC3-0A43-D6E1-7DD283E52E43}"/>
               </a:ext>
             </a:extLst>
           </p:cNvPr>
@@ -2922,7 +2922,7 @@
           <a:bodyPr/>
           <a:lstStyle/>
           <a:p>
-            <a:fld id="{62F14CDA-7F90-4E7F-8C43-D97DD14A1558}" type="datetimeFigureOut">
+            <a:fld id="{B3C8292C-6C7C-40C2-9CE5-631942545785}" type="datetimeFigureOut">
               <a:rPr kumimoji="1" lang="ja-JP" altLang="en-US" smtClean="0"/>
               <a:t>2026/7/30</a:t>
             </a:fld>
@@ -2935,7 +2935,7 @@
           <p:cNvPr id="6" name="フッター プレースホルダー 5">
             <a:extLst>
               <a:ext uri="{FF2B5EF4-FFF2-40B4-BE49-F238E27FC236}">
-                <a16:creationId xmlns:a16="http://schemas.microsoft.com/office/drawing/2014/main" id="{8A667F39-3263-E6B3-7658-B7582A069FD0}"/>
+                <a16:creationId xmlns:a16="http://schemas.microsoft.com/office/drawing/2014/main" id="{DF175BD7-0B26-4F72-BBBB-500A694DEAED}"/>
               </a:ext>
             </a:extLst>
           </p:cNvPr>
@@ -2960,7 +2960,7 @@
           <p:cNvPr id="7" name="スライド番号プレースホルダー 6">
             <a:extLst>
               <a:ext uri="{FF2B5EF4-FFF2-40B4-BE49-F238E27FC236}">
-                <a16:creationId xmlns:a16="http://schemas.microsoft.com/office/drawing/2014/main" id="{034625EE-DBD9-E457-A04C-A91AFCEB61BD}"/>
+                <a16:creationId xmlns:a16="http://schemas.microsoft.com/office/drawing/2014/main" id="{3BE587BD-1618-3803-45D0-69F7F1A512AC}"/>
               </a:ext>
             </a:extLst>
           </p:cNvPr>
@@ -2976,7 +2976,7 @@
           <a:bodyPr/>
           <a:lstStyle/>
           <a:p>
-            <a:fld id="{820CB0CC-B54E-42F5-AFA5-86C7A7FC4A9C}" type="slidenum">
+            <a:fld id="{D48E4DE2-859F-4B3C-9FA1-A82F1A60F149}" type="slidenum">
               <a:rPr kumimoji="1" lang="ja-JP" altLang="en-US" smtClean="0"/>
               <a:t>‹#›</a:t>
             </a:fld>
@@ -2987,7 +2987,7 @@
     </p:spTree>
     <p:extLst>
       <p:ext uri="{BB962C8B-B14F-4D97-AF65-F5344CB8AC3E}">
-        <p14:creationId xmlns:p14="http://schemas.microsoft.com/office/powerpoint/2010/main" val="2123062134"/>
+        <p14:creationId xmlns:p14="http://schemas.microsoft.com/office/powerpoint/2010/main" val="3380297913"/>
       </p:ext>
     </p:extLst>
   </p:cSld>
@@ -3024,7 +3024,7 @@
           <p:cNvPr id="2" name="タイトル プレースホルダー 1">
             <a:extLst>
               <a:ext uri="{FF2B5EF4-FFF2-40B4-BE49-F238E27FC236}">
-                <a16:creationId xmlns:a16="http://schemas.microsoft.com/office/drawing/2014/main" id="{EDA9FE70-9702-A406-2855-BEBBE5ABFDD8}"/>
+                <a16:creationId xmlns:a16="http://schemas.microsoft.com/office/drawing/2014/main" id="{BF77954E-6A16-DADE-4BD9-267304274961}"/>
               </a:ext>
             </a:extLst>
           </p:cNvPr>
@@ -3062,7 +3062,7 @@
           <p:cNvPr id="3" name="テキスト プレースホルダー 2">
             <a:extLst>
               <a:ext uri="{FF2B5EF4-FFF2-40B4-BE49-F238E27FC236}">
-                <a16:creationId xmlns:a16="http://schemas.microsoft.com/office/drawing/2014/main" id="{D4BF5B3F-D33B-BAE4-5B14-65DA480D6BAF}"/>
+                <a16:creationId xmlns:a16="http://schemas.microsoft.com/office/drawing/2014/main" id="{6EA52590-EDA9-D081-E1BE-EF4CB0F8A7A9}"/>
               </a:ext>
             </a:extLst>
           </p:cNvPr>
@@ -3161,7 +3161,7 @@
           <p:cNvPr id="4" name="日付プレースホルダー 3">
             <a:extLst>
               <a:ext uri="{FF2B5EF4-FFF2-40B4-BE49-F238E27FC236}">
-                <a16:creationId xmlns:a16="http://schemas.microsoft.com/office/drawing/2014/main" id="{772CA16F-6BAE-197B-4085-FD6DDE98FC02}"/>
+                <a16:creationId xmlns:a16="http://schemas.microsoft.com/office/drawing/2014/main" id="{928F1C7C-549C-E8A2-7874-E7006B31708B}"/>
               </a:ext>
             </a:extLst>
           </p:cNvPr>
@@ -3195,7 +3195,7 @@
             </a:lvl1pPr>
           </a:lstStyle>
           <a:p>
-            <a:fld id="{62F14CDA-7F90-4E7F-8C43-D97DD14A1558}" type="datetimeFigureOut">
+            <a:fld id="{B3C8292C-6C7C-40C2-9CE5-631942545785}" type="datetimeFigureOut">
               <a:rPr kumimoji="1" lang="ja-JP" altLang="en-US" smtClean="0"/>
               <a:t>2026/7/30</a:t>
             </a:fld>
@@ -3208,7 +3208,7 @@
           <p:cNvPr id="5" name="フッター プレースホルダー 4">
             <a:extLst>
               <a:ext uri="{FF2B5EF4-FFF2-40B4-BE49-F238E27FC236}">
-                <a16:creationId xmlns:a16="http://schemas.microsoft.com/office/drawing/2014/main" id="{D5DCB2E3-4247-445E-EAE4-469072F97563}"/>
+                <a16:creationId xmlns:a16="http://schemas.microsoft.com/office/drawing/2014/main" id="{4719F2B9-05DC-50E1-DF3C-B0DAC5404098}"/>
               </a:ext>
             </a:extLst>
           </p:cNvPr>
@@ -3251,7 +3251,7 @@
           <p:cNvPr id="6" name="スライド番号プレースホルダー 5">
             <a:extLst>
               <a:ext uri="{FF2B5EF4-FFF2-40B4-BE49-F238E27FC236}">
-                <a16:creationId xmlns:a16="http://schemas.microsoft.com/office/drawing/2014/main" id="{BEDC8318-D4DC-98A4-E84F-95422A1FBB33}"/>
+                <a16:creationId xmlns:a16="http://schemas.microsoft.com/office/drawing/2014/main" id="{8C8D274D-B32E-5DA5-5BBE-7A029AC989B0}"/>
               </a:ext>
             </a:extLst>
           </p:cNvPr>
@@ -3285,7 +3285,7 @@
             </a:lvl1pPr>
           </a:lstStyle>
           <a:p>
-            <a:fld id="{820CB0CC-B54E-42F5-AFA5-86C7A7FC4A9C}" type="slidenum">
+            <a:fld id="{D48E4DE2-859F-4B3C-9FA1-A82F1A60F149}" type="slidenum">
               <a:rPr kumimoji="1" lang="ja-JP" altLang="en-US" smtClean="0"/>
               <a:t>‹#›</a:t>
             </a:fld>
@@ -3296,7 +3296,7 @@
     </p:spTree>
     <p:extLst>
       <p:ext uri="{BB962C8B-B14F-4D97-AF65-F5344CB8AC3E}">
-        <p14:creationId xmlns:p14="http://schemas.microsoft.com/office/powerpoint/2010/main" val="3472908260"/>
+        <p14:creationId xmlns:p14="http://schemas.microsoft.com/office/powerpoint/2010/main" val="3122292578"/>
       </p:ext>
     </p:extLst>
   </p:cSld>
@@ -3619,7 +3619,7 @@
           <p:cNvPr id="2" name="テキスト ボックス 1">
             <a:extLst>
               <a:ext uri="{FF2B5EF4-FFF2-40B4-BE49-F238E27FC236}">
-                <a16:creationId xmlns:a16="http://schemas.microsoft.com/office/drawing/2014/main" id="{58AD510A-C336-681F-4B5F-1C1C11535E9B}"/>
+                <a16:creationId xmlns:a16="http://schemas.microsoft.com/office/drawing/2014/main" id="{A3A53C31-AF79-2EF8-432D-D35E38A3DF66}"/>
               </a:ext>
             </a:extLst>
           </p:cNvPr>
@@ -3665,7 +3665,7 @@
           <p:cNvPr id="3" name="テキスト ボックス 2">
             <a:extLst>
               <a:ext uri="{FF2B5EF4-FFF2-40B4-BE49-F238E27FC236}">
-                <a16:creationId xmlns:a16="http://schemas.microsoft.com/office/drawing/2014/main" id="{68E77369-0FF3-A131-C5F0-B87442A93294}"/>
+                <a16:creationId xmlns:a16="http://schemas.microsoft.com/office/drawing/2014/main" id="{C5A5A459-04AC-8743-5EB6-8734DDD26F62}"/>
               </a:ext>
             </a:extLst>
           </p:cNvPr>
@@ -3714,7 +3714,7 @@
           <p:cNvPr id="4" name="テキスト ボックス 3">
             <a:extLst>
               <a:ext uri="{FF2B5EF4-FFF2-40B4-BE49-F238E27FC236}">
-                <a16:creationId xmlns:a16="http://schemas.microsoft.com/office/drawing/2014/main" id="{F9DFC1CB-8AB2-BA00-78C4-950966A893B1}"/>
+                <a16:creationId xmlns:a16="http://schemas.microsoft.com/office/drawing/2014/main" id="{492A8C0E-FCD1-50D5-566F-1FAADAADB6B9}"/>
               </a:ext>
             </a:extLst>
           </p:cNvPr>
@@ -3754,7 +3754,7 @@
           <p:cNvPr id="5" name="テキスト ボックス 4">
             <a:extLst>
               <a:ext uri="{FF2B5EF4-FFF2-40B4-BE49-F238E27FC236}">
-                <a16:creationId xmlns:a16="http://schemas.microsoft.com/office/drawing/2014/main" id="{7AF30DAE-7438-C366-9DCE-E8DFB9210C34}"/>
+                <a16:creationId xmlns:a16="http://schemas.microsoft.com/office/drawing/2014/main" id="{56D5B507-D0EF-C977-E92B-0A827C6686D0}"/>
               </a:ext>
             </a:extLst>
           </p:cNvPr>
@@ -3801,7 +3801,7 @@
             <a:hlinkClick r:id="" action="ppaction://media"/>
             <a:extLst>
               <a:ext uri="{FF2B5EF4-FFF2-40B4-BE49-F238E27FC236}">
-                <a16:creationId xmlns:a16="http://schemas.microsoft.com/office/drawing/2014/main" id="{4FEC56DB-0EC9-F6D6-1C07-47CC84FD53CD}"/>
+                <a16:creationId xmlns:a16="http://schemas.microsoft.com/office/drawing/2014/main" id="{D6B81FCA-94D9-A500-0A7E-FB3CFB65D79E}"/>
               </a:ext>
             </a:extLst>
           </p:cNvPr>
@@ -3836,7 +3836,7 @@
     </p:spTree>
     <p:extLst>
       <p:ext uri="{BB962C8B-B14F-4D97-AF65-F5344CB8AC3E}">
-        <p14:creationId xmlns:p14="http://schemas.microsoft.com/office/powerpoint/2010/main" val="2848614523"/>
+        <p14:creationId xmlns:p14="http://schemas.microsoft.com/office/powerpoint/2010/main" val="1139121631"/>
       </p:ext>
     </p:extLst>
   </p:cSld>
@@ -3960,7 +3960,7 @@
           <p:cNvPr id="2" name="テキスト ボックス 1">
             <a:extLst>
               <a:ext uri="{FF2B5EF4-FFF2-40B4-BE49-F238E27FC236}">
-                <a16:creationId xmlns:a16="http://schemas.microsoft.com/office/drawing/2014/main" id="{97319FFE-9131-7146-CF7B-B6853F1716F1}"/>
+                <a16:creationId xmlns:a16="http://schemas.microsoft.com/office/drawing/2014/main" id="{4C84E5F4-4CD8-4326-83CB-F0B9DB6A4732}"/>
               </a:ext>
             </a:extLst>
           </p:cNvPr>
@@ -4006,7 +4006,7 @@
           <p:cNvPr id="3" name="テキスト ボックス 2">
             <a:extLst>
               <a:ext uri="{FF2B5EF4-FFF2-40B4-BE49-F238E27FC236}">
-                <a16:creationId xmlns:a16="http://schemas.microsoft.com/office/drawing/2014/main" id="{9893ADD5-1A95-E33E-2412-48B66A8078A0}"/>
+                <a16:creationId xmlns:a16="http://schemas.microsoft.com/office/drawing/2014/main" id="{A2CC03FB-C8BF-85F9-6E17-A986EB7CDB40}"/>
               </a:ext>
             </a:extLst>
           </p:cNvPr>
@@ -4046,7 +4046,7 @@
           <p:cNvPr id="4" name="テキスト ボックス 3">
             <a:extLst>
               <a:ext uri="{FF2B5EF4-FFF2-40B4-BE49-F238E27FC236}">
-                <a16:creationId xmlns:a16="http://schemas.microsoft.com/office/drawing/2014/main" id="{0F37B583-36CF-F215-9489-465782E02366}"/>
+                <a16:creationId xmlns:a16="http://schemas.microsoft.com/office/drawing/2014/main" id="{DF912046-2B03-EEEB-37C8-C64EBB5C7B2F}"/>
               </a:ext>
             </a:extLst>
           </p:cNvPr>
@@ -4095,7 +4095,7 @@
           <p:cNvPr id="5" name="テキスト ボックス 4">
             <a:extLst>
               <a:ext uri="{FF2B5EF4-FFF2-40B4-BE49-F238E27FC236}">
-                <a16:creationId xmlns:a16="http://schemas.microsoft.com/office/drawing/2014/main" id="{1BAF73EF-BD34-BF38-9B33-DE3148A1F8FC}"/>
+                <a16:creationId xmlns:a16="http://schemas.microsoft.com/office/drawing/2014/main" id="{872B0A07-9235-07CC-3271-D58436536EF3}"/>
               </a:ext>
             </a:extLst>
           </p:cNvPr>
@@ -4142,7 +4142,7 @@
             <a:hlinkClick r:id="" action="ppaction://media"/>
             <a:extLst>
               <a:ext uri="{FF2B5EF4-FFF2-40B4-BE49-F238E27FC236}">
-                <a16:creationId xmlns:a16="http://schemas.microsoft.com/office/drawing/2014/main" id="{8B0D0F65-B6FC-6D9D-AB4D-C794FF8F5252}"/>
+                <a16:creationId xmlns:a16="http://schemas.microsoft.com/office/drawing/2014/main" id="{7B3AB386-B85D-5756-EE47-4EF05D82C26B}"/>
               </a:ext>
             </a:extLst>
           </p:cNvPr>
@@ -4177,7 +4177,7 @@
     </p:spTree>
     <p:extLst>
       <p:ext uri="{BB962C8B-B14F-4D97-AF65-F5344CB8AC3E}">
-        <p14:creationId xmlns:p14="http://schemas.microsoft.com/office/powerpoint/2010/main" val="2383882867"/>
+        <p14:creationId xmlns:p14="http://schemas.microsoft.com/office/powerpoint/2010/main" val="1476794991"/>
       </p:ext>
     </p:extLst>
   </p:cSld>
@@ -4301,7 +4301,7 @@
           <p:cNvPr id="2" name="テキスト ボックス 1">
             <a:extLst>
               <a:ext uri="{FF2B5EF4-FFF2-40B4-BE49-F238E27FC236}">
-                <a16:creationId xmlns:a16="http://schemas.microsoft.com/office/drawing/2014/main" id="{97586DB8-06C7-8490-7431-6BAA2708C426}"/>
+                <a16:creationId xmlns:a16="http://schemas.microsoft.com/office/drawing/2014/main" id="{A73EB9FE-9DA9-A57B-3157-ECF9476017D2}"/>
               </a:ext>
             </a:extLst>
           </p:cNvPr>
@@ -4347,7 +4347,7 @@
           <p:cNvPr id="3" name="テキスト ボックス 2">
             <a:extLst>
               <a:ext uri="{FF2B5EF4-FFF2-40B4-BE49-F238E27FC236}">
-                <a16:creationId xmlns:a16="http://schemas.microsoft.com/office/drawing/2014/main" id="{49E3ED35-60FB-0BB1-B136-116F0FE58F64}"/>
+                <a16:creationId xmlns:a16="http://schemas.microsoft.com/office/drawing/2014/main" id="{DF170765-F1DC-D908-2B8C-861716A48443}"/>
               </a:ext>
             </a:extLst>
           </p:cNvPr>
@@ -4387,7 +4387,7 @@
           <p:cNvPr id="4" name="テキスト ボックス 3">
             <a:extLst>
               <a:ext uri="{FF2B5EF4-FFF2-40B4-BE49-F238E27FC236}">
-                <a16:creationId xmlns:a16="http://schemas.microsoft.com/office/drawing/2014/main" id="{35352CB9-6504-873B-7822-FC09A0ED7871}"/>
+                <a16:creationId xmlns:a16="http://schemas.microsoft.com/office/drawing/2014/main" id="{86FF0F8C-5FFA-94A0-CD8C-C67489FEE1B2}"/>
               </a:ext>
             </a:extLst>
           </p:cNvPr>
@@ -4500,7 +4500,7 @@
           <p:cNvPr id="5" name="テキスト ボックス 4">
             <a:extLst>
               <a:ext uri="{FF2B5EF4-FFF2-40B4-BE49-F238E27FC236}">
-                <a16:creationId xmlns:a16="http://schemas.microsoft.com/office/drawing/2014/main" id="{1076DB19-3A84-EE8A-144A-EAFEC2F6AF3B}"/>
+                <a16:creationId xmlns:a16="http://schemas.microsoft.com/office/drawing/2014/main" id="{A77CAD4A-5F8D-2128-326A-ABEF679A2FC0}"/>
               </a:ext>
             </a:extLst>
           </p:cNvPr>
@@ -4547,7 +4547,7 @@
             <a:hlinkClick r:id="" action="ppaction://media"/>
             <a:extLst>
               <a:ext uri="{FF2B5EF4-FFF2-40B4-BE49-F238E27FC236}">
-                <a16:creationId xmlns:a16="http://schemas.microsoft.com/office/drawing/2014/main" id="{438EDE3B-FA13-3443-4CB2-733290FAB138}"/>
+                <a16:creationId xmlns:a16="http://schemas.microsoft.com/office/drawing/2014/main" id="{CA5EFDBC-3391-806F-175C-633FFD45A32A}"/>
               </a:ext>
             </a:extLst>
           </p:cNvPr>
@@ -4582,7 +4582,7 @@
     </p:spTree>
     <p:extLst>
       <p:ext uri="{BB962C8B-B14F-4D97-AF65-F5344CB8AC3E}">
-        <p14:creationId xmlns:p14="http://schemas.microsoft.com/office/powerpoint/2010/main" val="658458737"/>
+        <p14:creationId xmlns:p14="http://schemas.microsoft.com/office/powerpoint/2010/main" val="2557506113"/>
       </p:ext>
     </p:extLst>
   </p:cSld>
@@ -4706,7 +4706,7 @@
           <p:cNvPr id="2" name="テキスト ボックス 1">
             <a:extLst>
               <a:ext uri="{FF2B5EF4-FFF2-40B4-BE49-F238E27FC236}">
-                <a16:creationId xmlns:a16="http://schemas.microsoft.com/office/drawing/2014/main" id="{4B5A40D2-CCC4-2660-8CAB-1AB8C49BA761}"/>
+                <a16:creationId xmlns:a16="http://schemas.microsoft.com/office/drawing/2014/main" id="{C956E29F-9CE3-6D73-1D92-89D7D9E2D136}"/>
               </a:ext>
             </a:extLst>
           </p:cNvPr>
@@ -4752,7 +4752,7 @@
           <p:cNvPr id="3" name="テキスト ボックス 2">
             <a:extLst>
               <a:ext uri="{FF2B5EF4-FFF2-40B4-BE49-F238E27FC236}">
-                <a16:creationId xmlns:a16="http://schemas.microsoft.com/office/drawing/2014/main" id="{6783AC70-77C1-C792-FA66-6CAFE7FC531B}"/>
+                <a16:creationId xmlns:a16="http://schemas.microsoft.com/office/drawing/2014/main" id="{1474B90F-D8AC-A569-7C7B-27208BC98AE6}"/>
               </a:ext>
             </a:extLst>
           </p:cNvPr>
@@ -4792,7 +4792,7 @@
           <p:cNvPr id="4" name="テキスト ボックス 3">
             <a:extLst>
               <a:ext uri="{FF2B5EF4-FFF2-40B4-BE49-F238E27FC236}">
-                <a16:creationId xmlns:a16="http://schemas.microsoft.com/office/drawing/2014/main" id="{B33E75F9-3C73-B9AF-7C67-83D9BA58F0D0}"/>
+                <a16:creationId xmlns:a16="http://schemas.microsoft.com/office/drawing/2014/main" id="{83D4F82D-EC06-C581-49A9-A47FF06B46C3}"/>
               </a:ext>
             </a:extLst>
           </p:cNvPr>
@@ -4902,7 +4902,7 @@
           <p:cNvPr id="5" name="テキスト ボックス 4">
             <a:extLst>
               <a:ext uri="{FF2B5EF4-FFF2-40B4-BE49-F238E27FC236}">
-                <a16:creationId xmlns:a16="http://schemas.microsoft.com/office/drawing/2014/main" id="{2B69DB59-0C58-2308-3D54-8FD3C23BC2CF}"/>
+                <a16:creationId xmlns:a16="http://schemas.microsoft.com/office/drawing/2014/main" id="{A29E6C76-73F8-FCEC-D98B-3BF79876F6E5}"/>
               </a:ext>
             </a:extLst>
           </p:cNvPr>
@@ -4949,7 +4949,7 @@
             <a:hlinkClick r:id="" action="ppaction://media"/>
             <a:extLst>
               <a:ext uri="{FF2B5EF4-FFF2-40B4-BE49-F238E27FC236}">
-                <a16:creationId xmlns:a16="http://schemas.microsoft.com/office/drawing/2014/main" id="{1529F32B-FF08-E46D-0FE6-EB994454CDA2}"/>
+                <a16:creationId xmlns:a16="http://schemas.microsoft.com/office/drawing/2014/main" id="{A272DBD4-424A-620D-3023-E654A1B2EA0E}"/>
               </a:ext>
             </a:extLst>
           </p:cNvPr>
@@ -4984,7 +4984,7 @@
     </p:spTree>
     <p:extLst>
       <p:ext uri="{BB962C8B-B14F-4D97-AF65-F5344CB8AC3E}">
-        <p14:creationId xmlns:p14="http://schemas.microsoft.com/office/powerpoint/2010/main" val="3865785141"/>
+        <p14:creationId xmlns:p14="http://schemas.microsoft.com/office/powerpoint/2010/main" val="4037357294"/>
       </p:ext>
     </p:extLst>
   </p:cSld>
@@ -5108,7 +5108,7 @@
           <p:cNvPr id="2" name="テキスト ボックス 1">
             <a:extLst>
               <a:ext uri="{FF2B5EF4-FFF2-40B4-BE49-F238E27FC236}">
-                <a16:creationId xmlns:a16="http://schemas.microsoft.com/office/drawing/2014/main" id="{FC23F86B-39F9-34F4-2DD8-34D9BE75177D}"/>
+                <a16:creationId xmlns:a16="http://schemas.microsoft.com/office/drawing/2014/main" id="{FFBCFB48-C058-ACAE-54BA-0424177E3549}"/>
               </a:ext>
             </a:extLst>
           </p:cNvPr>
@@ -5154,7 +5154,7 @@
           <p:cNvPr id="3" name="テキスト ボックス 2">
             <a:extLst>
               <a:ext uri="{FF2B5EF4-FFF2-40B4-BE49-F238E27FC236}">
-                <a16:creationId xmlns:a16="http://schemas.microsoft.com/office/drawing/2014/main" id="{1591970C-8CA9-B159-E133-93831769ED6A}"/>
+                <a16:creationId xmlns:a16="http://schemas.microsoft.com/office/drawing/2014/main" id="{1AFD1FB8-818C-9E81-7947-DD4BF39984B9}"/>
               </a:ext>
             </a:extLst>
           </p:cNvPr>
@@ -5194,7 +5194,7 @@
           <p:cNvPr id="4" name="テキスト ボックス 3">
             <a:extLst>
               <a:ext uri="{FF2B5EF4-FFF2-40B4-BE49-F238E27FC236}">
-                <a16:creationId xmlns:a16="http://schemas.microsoft.com/office/drawing/2014/main" id="{F5A4B8AD-018D-CCB7-EDFE-3320970EC55D}"/>
+                <a16:creationId xmlns:a16="http://schemas.microsoft.com/office/drawing/2014/main" id="{2DE062CC-E345-8AA5-D694-E297B23B7DB0}"/>
               </a:ext>
             </a:extLst>
           </p:cNvPr>
@@ -5224,25 +5224,7 @@
                 </a:solidFill>
                 <a:latin typeface="Arial" panose="020B0604020202020204" pitchFamily="34" charset="0"/>
               </a:rPr>
-              <a:t>診断結果ページに</a:t>
-            </a:r>
-            <a:r>
-              <a:rPr kumimoji="1" lang="en-US" altLang="ja-JP" sz="2000">
-                <a:solidFill>
-                  <a:srgbClr val="333333"/>
-                </a:solidFill>
-                <a:latin typeface="Arial" panose="020B0604020202020204" pitchFamily="34" charset="0"/>
-              </a:rPr>
-              <a:t>LINE</a:t>
-            </a:r>
-            <a:r>
-              <a:rPr kumimoji="1" lang="ja-JP" altLang="en-US" sz="2000">
-                <a:solidFill>
-                  <a:srgbClr val="333333"/>
-                </a:solidFill>
-                <a:latin typeface="Arial" panose="020B0604020202020204" pitchFamily="34" charset="0"/>
-              </a:rPr>
-              <a:t>シェアボタンを追加</a:t>
+              <a:t>直近のコミットでは、実装の見直しと継続的な改善が行われました。</a:t>
             </a:r>
           </a:p>
         </p:txBody>
@@ -5252,7 +5234,7 @@
           <p:cNvPr id="5" name="テキスト ボックス 4">
             <a:extLst>
               <a:ext uri="{FF2B5EF4-FFF2-40B4-BE49-F238E27FC236}">
-                <a16:creationId xmlns:a16="http://schemas.microsoft.com/office/drawing/2014/main" id="{E5BE00F4-96C7-21B9-CFBB-8445FA29139F}"/>
+                <a16:creationId xmlns:a16="http://schemas.microsoft.com/office/drawing/2014/main" id="{33E0C7B0-453A-E97F-4212-0D1A1C4A0F8C}"/>
               </a:ext>
             </a:extLst>
           </p:cNvPr>
@@ -5299,7 +5281,7 @@
             <a:hlinkClick r:id="" action="ppaction://media"/>
             <a:extLst>
               <a:ext uri="{FF2B5EF4-FFF2-40B4-BE49-F238E27FC236}">
-                <a16:creationId xmlns:a16="http://schemas.microsoft.com/office/drawing/2014/main" id="{8D50C9DD-EE09-145E-B387-D3285942A54D}"/>
+                <a16:creationId xmlns:a16="http://schemas.microsoft.com/office/drawing/2014/main" id="{54048FA2-6D41-795C-8D79-CF65E8434485}"/>
               </a:ext>
             </a:extLst>
           </p:cNvPr>
@@ -5334,7 +5316,7 @@
     </p:spTree>
     <p:extLst>
       <p:ext uri="{BB962C8B-B14F-4D97-AF65-F5344CB8AC3E}">
-        <p14:creationId xmlns:p14="http://schemas.microsoft.com/office/powerpoint/2010/main" val="37446351"/>
+        <p14:creationId xmlns:p14="http://schemas.microsoft.com/office/powerpoint/2010/main" val="1969187467"/>
       </p:ext>
     </p:extLst>
   </p:cSld>
@@ -5343,10 +5325,10 @@
   </p:clrMapOvr>
   <mc:AlternateContent xmlns:mc="http://schemas.openxmlformats.org/markup-compatibility/2006">
     <mc:Choice xmlns:p14="http://schemas.microsoft.com/office/powerpoint/2010/main" Requires="p14">
-      <p:transition spd="slow" p14:dur="2000" advTm="8000"/>
+      <p:transition spd="slow" p14:dur="2000" advTm="7000"/>
     </mc:Choice>
     <mc:Fallback>
-      <p:transition spd="slow" advTm="8000"/>
+      <p:transition spd="slow" advTm="7000"/>
     </mc:Fallback>
   </mc:AlternateContent>
   <p:timing>
@@ -5377,7 +5359,7 @@
                                   <p:childTnLst>
                                     <p:cmd type="call" cmd="playFrom(0.0)">
                                       <p:cBhvr>
-                                        <p:cTn id="6" dur="7126" fill="hold"/>
+                                        <p:cTn id="6" dur="6076" fill="hold"/>
                                         <p:tgtEl>
                                           <p:spTgt spid="6"/>
                                         </p:tgtEl>
@@ -5458,7 +5440,7 @@
           <p:cNvPr id="2" name="テキスト ボックス 1">
             <a:extLst>
               <a:ext uri="{FF2B5EF4-FFF2-40B4-BE49-F238E27FC236}">
-                <a16:creationId xmlns:a16="http://schemas.microsoft.com/office/drawing/2014/main" id="{EA2DDA9E-887D-9CE2-4F49-BE80392ED4A8}"/>
+                <a16:creationId xmlns:a16="http://schemas.microsoft.com/office/drawing/2014/main" id="{B9EF77BF-C026-2FC4-7118-DAFDF39784F3}"/>
               </a:ext>
             </a:extLst>
           </p:cNvPr>
@@ -5504,7 +5486,7 @@
           <p:cNvPr id="3" name="テキスト ボックス 2">
             <a:extLst>
               <a:ext uri="{FF2B5EF4-FFF2-40B4-BE49-F238E27FC236}">
-                <a16:creationId xmlns:a16="http://schemas.microsoft.com/office/drawing/2014/main" id="{B81A6A3E-FEF1-8D0A-4728-5E17B040385A}"/>
+                <a16:creationId xmlns:a16="http://schemas.microsoft.com/office/drawing/2014/main" id="{6A55DD7B-4311-33A3-3094-51826F6F918F}"/>
               </a:ext>
             </a:extLst>
           </p:cNvPr>
@@ -5544,7 +5526,7 @@
           <p:cNvPr id="4" name="テキスト ボックス 3">
             <a:extLst>
               <a:ext uri="{FF2B5EF4-FFF2-40B4-BE49-F238E27FC236}">
-                <a16:creationId xmlns:a16="http://schemas.microsoft.com/office/drawing/2014/main" id="{8A76CAEE-12D4-0781-D88B-BAE0DB41567B}"/>
+                <a16:creationId xmlns:a16="http://schemas.microsoft.com/office/drawing/2014/main" id="{91AE2716-5D8E-CD7C-E34C-6AD3DCC11B73}"/>
               </a:ext>
             </a:extLst>
           </p:cNvPr>
@@ -5609,7 +5591,7 @@
           <p:cNvPr id="5" name="テキスト ボックス 4">
             <a:extLst>
               <a:ext uri="{FF2B5EF4-FFF2-40B4-BE49-F238E27FC236}">
-                <a16:creationId xmlns:a16="http://schemas.microsoft.com/office/drawing/2014/main" id="{B10EDA38-96BB-73BF-1A0E-DAD8433103CE}"/>
+                <a16:creationId xmlns:a16="http://schemas.microsoft.com/office/drawing/2014/main" id="{0B9AA667-ECCB-8488-103E-7EB252A33B11}"/>
               </a:ext>
             </a:extLst>
           </p:cNvPr>
@@ -5656,7 +5638,7 @@
             <a:hlinkClick r:id="" action="ppaction://media"/>
             <a:extLst>
               <a:ext uri="{FF2B5EF4-FFF2-40B4-BE49-F238E27FC236}">
-                <a16:creationId xmlns:a16="http://schemas.microsoft.com/office/drawing/2014/main" id="{2E71A70A-81D4-696E-F05D-539CBF635FEC}"/>
+                <a16:creationId xmlns:a16="http://schemas.microsoft.com/office/drawing/2014/main" id="{3F5BE5CF-49FB-6504-8AF7-5D942CC3BA38}"/>
               </a:ext>
             </a:extLst>
           </p:cNvPr>
@@ -5691,7 +5673,7 @@
     </p:spTree>
     <p:extLst>
       <p:ext uri="{BB962C8B-B14F-4D97-AF65-F5344CB8AC3E}">
-        <p14:creationId xmlns:p14="http://schemas.microsoft.com/office/powerpoint/2010/main" val="3974774765"/>
+        <p14:creationId xmlns:p14="http://schemas.microsoft.com/office/powerpoint/2010/main" val="686670271"/>
       </p:ext>
     </p:extLst>
   </p:cSld>
